--- a/assets/pptx/catalog-344.pptx
+++ b/assets/pptx/catalog-344.pptx
@@ -3493,7 +3493,7 @@
                 <a:ea typeface="Ebrima"/>
                 <a:cs typeface="Ebrima"/>
               </a:rPr>
-              <a:t>እንዳላጣው በተራ ነገር (2x)</a:t>
+              <a:t>እንዳላጣው በተራ ነገር 2x</a:t>
             </a:r>
           </a:p>
         </p:txBody>
@@ -3807,7 +3807,7 @@
                 <a:ea typeface="Ebrima"/>
                 <a:cs typeface="Ebrima"/>
               </a:rPr>
-              <a:t>እንዳላጣው በተራ ነገር (2x)</a:t>
+              <a:t>እንዳላጣው በተራ ነገር 2x</a:t>
             </a:r>
           </a:p>
         </p:txBody>
@@ -4067,7 +4067,7 @@
                 <a:ea typeface="Ebrima"/>
                 <a:cs typeface="Ebrima"/>
               </a:rPr>
-              <a:t>- አግዘኝ ደግፈኝ (ደግፈኝ)</a:t>
+              <a:t>- አግዘኝ ደግፈኝ ደግፈኝ</a:t>
             </a:r>
           </a:p>
           <a:p>
@@ -4085,7 +4085,7 @@
                 <a:ea typeface="Ebrima"/>
                 <a:cs typeface="Ebrima"/>
               </a:rPr>
-              <a:t>ብቻዬን አቅም የለኝ (ብቻዬን----አቅም የለኝ)</a:t>
+              <a:t>ብቻዬን አቅም የለኝ ብቻዬን----አቅም የለኝ</a:t>
             </a:r>
           </a:p>
           <a:p>
@@ -4103,7 +4103,7 @@
                 <a:ea typeface="Ebrima"/>
                 <a:cs typeface="Ebrima"/>
               </a:rPr>
-              <a:t>ያየህልኝን ቁም ነገር (ያየህልኝን----ቁም ነገር)</a:t>
+              <a:t>ያየህልኝን ቁም ነገር ያየህልኝን----ቁም ነገር</a:t>
             </a:r>
           </a:p>
           <a:p>
@@ -4121,7 +4121,7 @@
                 <a:ea typeface="Ebrima"/>
                 <a:cs typeface="Ebrima"/>
               </a:rPr>
-              <a:t>እንዳላጣው በተራ ነገር (እንዳላጣው----ተራ ነገር) (2x)</a:t>
+              <a:t>እንዳላጣው በተራ ነገር እንዳላጣው----ተራ ነገር 2x</a:t>
             </a:r>
           </a:p>
         </p:txBody>
